--- a/Admin_Portfolio_executive_presentation.pptx
+++ b/Admin_Portfolio_executive_presentation.pptx
@@ -3095,47 +3095,414 @@
       <p:grpSpPr/>
       <p:sp>
         <p:nvSpPr>
-          <p:cNvPr id="2" name="Title 1"/>
-          <p:cNvSpPr>
-            <a:spLocks noGrp="1"/>
-          </p:cNvSpPr>
-          <p:nvPr>
-            <p:ph type="ctrTitle"/>
-          </p:nvPr>
-        </p:nvSpPr>
-        <p:spPr/>
-        <p:txBody>
-          <a:bodyPr/>
-          <a:lstStyle/>
-          <a:p>
-            <a:r>
-              <a:t>Cloud Executive Dashboard</a:t>
-            </a:r>
-          </a:p>
-        </p:txBody>
-      </p:sp>
-      <p:sp>
-        <p:nvSpPr>
-          <p:cNvPr id="3" name="Subtitle 2"/>
-          <p:cNvSpPr>
-            <a:spLocks noGrp="1"/>
-          </p:cNvSpPr>
-          <p:nvPr>
-            <p:ph type="subTitle" idx="1"/>
-          </p:nvPr>
-        </p:nvSpPr>
-        <p:spPr/>
-        <p:txBody>
-          <a:bodyPr/>
-          <a:lstStyle/>
-          <a:p>
-            <a:r>
-              <a:t>Client: Admin Portfolio</a:t>
-            </a:r>
-          </a:p>
-          <a:p>
-            <a:r>
-              <a:t>Date: 2026-03-19</a:t>
+          <p:cNvPr id="2" name="Rectangle 1"/>
+          <p:cNvSpPr/>
+          <p:nvPr/>
+        </p:nvSpPr>
+        <p:spPr>
+          <a:xfrm>
+            <a:off x="0" y="0"/>
+            <a:ext cx="9144000" cy="6858000"/>
+          </a:xfrm>
+          <a:prstGeom prst="rect">
+            <a:avLst/>
+          </a:prstGeom>
+          <a:solidFill>
+            <a:srgbClr val="0B192C"/>
+          </a:solidFill>
+          <a:ln>
+            <a:noFill/>
+          </a:ln>
+        </p:spPr>
+        <p:style>
+          <a:lnRef idx="1">
+            <a:schemeClr val="accent1"/>
+          </a:lnRef>
+          <a:fillRef idx="3">
+            <a:schemeClr val="accent1"/>
+          </a:fillRef>
+          <a:effectRef idx="2">
+            <a:schemeClr val="accent1"/>
+          </a:effectRef>
+          <a:fontRef idx="minor">
+            <a:schemeClr val="lt1"/>
+          </a:fontRef>
+        </p:style>
+        <p:txBody>
+          <a:bodyPr rtlCol="0" anchor="ctr"/>
+          <a:lstStyle/>
+          <a:p>
+            <a:pPr algn="ctr"/>
+          </a:p>
+        </p:txBody>
+      </p:sp>
+      <p:sp>
+        <p:nvSpPr>
+          <p:cNvPr id="3" name="TextBox 2"/>
+          <p:cNvSpPr txBox="1"/>
+          <p:nvPr/>
+        </p:nvSpPr>
+        <p:spPr>
+          <a:xfrm>
+            <a:off x="548640" y="548640"/>
+            <a:ext cx="3657600" cy="274320"/>
+          </a:xfrm>
+          <a:prstGeom prst="rect">
+            <a:avLst/>
+          </a:prstGeom>
+          <a:noFill/>
+        </p:spPr>
+        <p:txBody>
+          <a:bodyPr wrap="none">
+            <a:spAutoFit/>
+          </a:bodyPr>
+          <a:lstStyle/>
+          <a:p>
+            <a:pPr>
+              <a:spcAft>
+                <a:spcPts val="0"/>
+              </a:spcAft>
+              <a:defRPr sz="1400" b="1">
+                <a:solidFill>
+                  <a:srgbClr val="1ABC9C"/>
+                </a:solidFill>
+                <a:latin typeface="Montserrat"/>
+              </a:defRPr>
+            </a:pPr>
+            <a:r>
+              <a:t>EXECUTIVE SUMMARY</a:t>
+            </a:r>
+          </a:p>
+        </p:txBody>
+      </p:sp>
+      <p:sp>
+        <p:nvSpPr>
+          <p:cNvPr id="4" name="TextBox 3"/>
+          <p:cNvSpPr txBox="1"/>
+          <p:nvPr/>
+        </p:nvSpPr>
+        <p:spPr>
+          <a:xfrm>
+            <a:off x="548640" y="914400"/>
+            <a:ext cx="5486400" cy="914400"/>
+          </a:xfrm>
+          <a:prstGeom prst="rect">
+            <a:avLst/>
+          </a:prstGeom>
+          <a:noFill/>
+        </p:spPr>
+        <p:txBody>
+          <a:bodyPr wrap="none">
+            <a:spAutoFit/>
+          </a:bodyPr>
+          <a:lstStyle/>
+          <a:p>
+            <a:pPr>
+              <a:spcAft>
+                <a:spcPts val="0"/>
+              </a:spcAft>
+              <a:defRPr sz="3600" b="1">
+                <a:solidFill>
+                  <a:srgbClr val="FFFFFF"/>
+                </a:solidFill>
+                <a:latin typeface="Montserrat"/>
+              </a:defRPr>
+            </a:pPr>
+            <a:r>
+              <a:t>Cloud Executive</a:t>
+            </a:r>
+            <a:br/>
+            <a:r>
+              <a:t>Advisory Report</a:t>
+            </a:r>
+          </a:p>
+        </p:txBody>
+      </p:sp>
+      <p:sp>
+        <p:nvSpPr>
+          <p:cNvPr id="5" name="TextBox 4"/>
+          <p:cNvSpPr txBox="1"/>
+          <p:nvPr/>
+        </p:nvSpPr>
+        <p:spPr>
+          <a:xfrm>
+            <a:off x="548640" y="2011680"/>
+            <a:ext cx="1097280" cy="182880"/>
+          </a:xfrm>
+          <a:prstGeom prst="rect">
+            <a:avLst/>
+          </a:prstGeom>
+          <a:noFill/>
+        </p:spPr>
+        <p:txBody>
+          <a:bodyPr wrap="none">
+            <a:spAutoFit/>
+          </a:bodyPr>
+          <a:lstStyle/>
+          <a:p>
+            <a:pPr>
+              <a:spcAft>
+                <a:spcPts val="0"/>
+              </a:spcAft>
+              <a:defRPr sz="1200">
+                <a:solidFill>
+                  <a:srgbClr val="8FA0B5"/>
+                </a:solidFill>
+                <a:latin typeface="Open Sans"/>
+              </a:defRPr>
+            </a:pPr>
+            <a:r>
+              <a:t>Client</a:t>
+            </a:r>
+          </a:p>
+        </p:txBody>
+      </p:sp>
+      <p:sp>
+        <p:nvSpPr>
+          <p:cNvPr id="6" name="TextBox 5"/>
+          <p:cNvSpPr txBox="1"/>
+          <p:nvPr/>
+        </p:nvSpPr>
+        <p:spPr>
+          <a:xfrm>
+            <a:off x="548640" y="2194560"/>
+            <a:ext cx="2286000" cy="274320"/>
+          </a:xfrm>
+          <a:prstGeom prst="rect">
+            <a:avLst/>
+          </a:prstGeom>
+          <a:noFill/>
+        </p:spPr>
+        <p:txBody>
+          <a:bodyPr wrap="none">
+            <a:spAutoFit/>
+          </a:bodyPr>
+          <a:lstStyle/>
+          <a:p>
+            <a:pPr>
+              <a:spcAft>
+                <a:spcPts val="0"/>
+              </a:spcAft>
+              <a:defRPr sz="1600" b="1">
+                <a:solidFill>
+                  <a:srgbClr val="FFFFFF"/>
+                </a:solidFill>
+                <a:latin typeface="Montserrat"/>
+              </a:defRPr>
+            </a:pPr>
+            <a:r>
+              <a:t>Admin Portfolio</a:t>
+            </a:r>
+          </a:p>
+        </p:txBody>
+      </p:sp>
+      <p:sp>
+        <p:nvSpPr>
+          <p:cNvPr id="7" name="TextBox 6"/>
+          <p:cNvSpPr txBox="1"/>
+          <p:nvPr/>
+        </p:nvSpPr>
+        <p:spPr>
+          <a:xfrm>
+            <a:off x="2926080" y="2011680"/>
+            <a:ext cx="1097280" cy="182880"/>
+          </a:xfrm>
+          <a:prstGeom prst="rect">
+            <a:avLst/>
+          </a:prstGeom>
+          <a:noFill/>
+        </p:spPr>
+        <p:txBody>
+          <a:bodyPr wrap="none">
+            <a:spAutoFit/>
+          </a:bodyPr>
+          <a:lstStyle/>
+          <a:p>
+            <a:pPr>
+              <a:spcAft>
+                <a:spcPts val="0"/>
+              </a:spcAft>
+              <a:defRPr sz="1200">
+                <a:solidFill>
+                  <a:srgbClr val="8FA0B5"/>
+                </a:solidFill>
+                <a:latin typeface="Open Sans"/>
+              </a:defRPr>
+            </a:pPr>
+            <a:r>
+              <a:t>Date</a:t>
+            </a:r>
+          </a:p>
+        </p:txBody>
+      </p:sp>
+      <p:sp>
+        <p:nvSpPr>
+          <p:cNvPr id="8" name="TextBox 7"/>
+          <p:cNvSpPr txBox="1"/>
+          <p:nvPr/>
+        </p:nvSpPr>
+        <p:spPr>
+          <a:xfrm>
+            <a:off x="2926080" y="2194560"/>
+            <a:ext cx="1828800" cy="274320"/>
+          </a:xfrm>
+          <a:prstGeom prst="rect">
+            <a:avLst/>
+          </a:prstGeom>
+          <a:noFill/>
+        </p:spPr>
+        <p:txBody>
+          <a:bodyPr wrap="none">
+            <a:spAutoFit/>
+          </a:bodyPr>
+          <a:lstStyle/>
+          <a:p>
+            <a:pPr>
+              <a:spcAft>
+                <a:spcPts val="0"/>
+              </a:spcAft>
+              <a:defRPr sz="1600" b="1">
+                <a:solidFill>
+                  <a:srgbClr val="FFFFFF"/>
+                </a:solidFill>
+                <a:latin typeface="Montserrat"/>
+              </a:defRPr>
+            </a:pPr>
+            <a:r>
+              <a:t>2026-03-22</a:t>
+            </a:r>
+          </a:p>
+        </p:txBody>
+      </p:sp>
+      <p:sp>
+        <p:nvSpPr>
+          <p:cNvPr id="9" name="Rectangle 8"/>
+          <p:cNvSpPr/>
+          <p:nvPr/>
+        </p:nvSpPr>
+        <p:spPr>
+          <a:xfrm>
+            <a:off x="0" y="6217920"/>
+            <a:ext cx="9144000" cy="640080"/>
+          </a:xfrm>
+          <a:prstGeom prst="rect">
+            <a:avLst/>
+          </a:prstGeom>
+          <a:solidFill>
+            <a:srgbClr val="081220"/>
+          </a:solidFill>
+          <a:ln>
+            <a:noFill/>
+          </a:ln>
+        </p:spPr>
+        <p:style>
+          <a:lnRef idx="1">
+            <a:schemeClr val="accent1"/>
+          </a:lnRef>
+          <a:fillRef idx="3">
+            <a:schemeClr val="accent1"/>
+          </a:fillRef>
+          <a:effectRef idx="2">
+            <a:schemeClr val="accent1"/>
+          </a:effectRef>
+          <a:fontRef idx="minor">
+            <a:schemeClr val="lt1"/>
+          </a:fontRef>
+        </p:style>
+        <p:txBody>
+          <a:bodyPr rtlCol="0" anchor="ctr"/>
+          <a:lstStyle/>
+          <a:p>
+            <a:pPr algn="ctr"/>
+          </a:p>
+        </p:txBody>
+      </p:sp>
+      <p:sp>
+        <p:nvSpPr>
+          <p:cNvPr id="10" name="TextBox 9"/>
+          <p:cNvSpPr txBox="1"/>
+          <p:nvPr/>
+        </p:nvSpPr>
+        <p:spPr>
+          <a:xfrm>
+            <a:off x="0" y="6446520"/>
+            <a:ext cx="9144000" cy="274320"/>
+          </a:xfrm>
+          <a:prstGeom prst="rect">
+            <a:avLst/>
+          </a:prstGeom>
+          <a:noFill/>
+        </p:spPr>
+        <p:txBody>
+          <a:bodyPr wrap="none">
+            <a:spAutoFit/>
+          </a:bodyPr>
+          <a:lstStyle/>
+          <a:p>
+            <a:pPr algn="ctr">
+              <a:spcAft>
+                <a:spcPts val="0"/>
+              </a:spcAft>
+              <a:defRPr sz="1600" b="1">
+                <a:solidFill>
+                  <a:srgbClr val="E74C3C"/>
+                </a:solidFill>
+                <a:latin typeface="Open Sans"/>
+              </a:defRPr>
+            </a:pPr>
+            <a:r>
+              <a:t>Confidential — For Executive Review Only</a:t>
+            </a:r>
+          </a:p>
+        </p:txBody>
+      </p:sp>
+      <p:sp>
+        <p:nvSpPr>
+          <p:cNvPr id="11" name="TextBox 10"/>
+          <p:cNvSpPr txBox="1"/>
+          <p:nvPr/>
+        </p:nvSpPr>
+        <p:spPr>
+          <a:xfrm>
+            <a:off x="10515600" y="1097280"/>
+            <a:ext cx="1097280" cy="1097280"/>
+          </a:xfrm>
+          <a:prstGeom prst="rect">
+            <a:avLst/>
+          </a:prstGeom>
+          <a:noFill/>
+        </p:spPr>
+        <p:txBody>
+          <a:bodyPr wrap="none">
+            <a:spAutoFit/>
+          </a:bodyPr>
+          <a:lstStyle/>
+          <a:p>
+            <a:pPr algn="l">
+              <a:spcAft>
+                <a:spcPts val="0"/>
+              </a:spcAft>
+              <a:defRPr sz="1800">
+                <a:solidFill>
+                  <a:srgbClr val="FFFFFF"/>
+                </a:solidFill>
+                <a:latin typeface="Montserrat"/>
+              </a:defRPr>
+            </a:pPr>
+            <a:r>
+              <a:t>+ + + +</a:t>
+            </a:r>
+            <a:br/>
+            <a:r>
+              <a:t>+ + + +</a:t>
+            </a:r>
+            <a:br/>
+            <a:r>
+              <a:t>+ + + +</a:t>
+            </a:r>
+            <a:br/>
+            <a:r>
+              <a:t>+ + + +</a:t>
             </a:r>
           </a:p>
         </p:txBody>
@@ -3160,62 +3527,934 @@
       <p:grpSpPr/>
       <p:sp>
         <p:nvSpPr>
-          <p:cNvPr id="2" name="Title 1"/>
-          <p:cNvSpPr>
-            <a:spLocks noGrp="1"/>
-          </p:cNvSpPr>
-          <p:nvPr>
-            <p:ph type="title"/>
-          </p:nvPr>
-        </p:nvSpPr>
-        <p:spPr/>
-        <p:txBody>
-          <a:bodyPr/>
-          <a:lstStyle/>
-          <a:p>
-            <a:r>
-              <a:t>Executive Summary</a:t>
-            </a:r>
-          </a:p>
-        </p:txBody>
-      </p:sp>
-      <p:sp>
-        <p:nvSpPr>
-          <p:cNvPr id="3" name="Content Placeholder 2"/>
-          <p:cNvSpPr>
-            <a:spLocks noGrp="1"/>
-          </p:cNvSpPr>
-          <p:nvPr>
-            <p:ph idx="1"/>
-          </p:nvPr>
-        </p:nvSpPr>
-        <p:spPr/>
-        <p:txBody>
-          <a:bodyPr/>
-          <a:lstStyle/>
-          <a:p>
-            <a:r>
-              <a:t>• Monthly Cloud Spend: ₹29,202</a:t>
-            </a:r>
-          </a:p>
-          <a:p>
-            <a:r>
-              <a:t>• Estimated Savings: ₹15,650 (53.6%)</a:t>
-            </a:r>
-          </a:p>
-          <a:p>
-            <a:r>
-              <a:t>• Cloud Maturity: 81/100</a:t>
-            </a:r>
-          </a:p>
-          <a:p>
-            <a:r>
-              <a:t>• Transformation Readiness: 89/100</a:t>
-            </a:r>
-          </a:p>
-          <a:p>
-            <a:r>
-              <a:t>• Focus: Cost optimization and modernization</a:t>
+          <p:cNvPr id="2" name="Rectangle 1"/>
+          <p:cNvSpPr/>
+          <p:nvPr/>
+        </p:nvSpPr>
+        <p:spPr>
+          <a:xfrm>
+            <a:off x="0" y="0"/>
+            <a:ext cx="9144000" cy="6858000"/>
+          </a:xfrm>
+          <a:prstGeom prst="rect">
+            <a:avLst/>
+          </a:prstGeom>
+          <a:solidFill>
+            <a:srgbClr val="0B192C"/>
+          </a:solidFill>
+          <a:ln>
+            <a:noFill/>
+          </a:ln>
+        </p:spPr>
+        <p:style>
+          <a:lnRef idx="1">
+            <a:schemeClr val="accent1"/>
+          </a:lnRef>
+          <a:fillRef idx="3">
+            <a:schemeClr val="accent1"/>
+          </a:fillRef>
+          <a:effectRef idx="2">
+            <a:schemeClr val="accent1"/>
+          </a:effectRef>
+          <a:fontRef idx="minor">
+            <a:schemeClr val="lt1"/>
+          </a:fontRef>
+        </p:style>
+        <p:txBody>
+          <a:bodyPr rtlCol="0" anchor="ctr"/>
+          <a:lstStyle/>
+          <a:p>
+            <a:pPr algn="ctr"/>
+          </a:p>
+        </p:txBody>
+      </p:sp>
+      <p:sp>
+        <p:nvSpPr>
+          <p:cNvPr id="3" name="TextBox 2"/>
+          <p:cNvSpPr txBox="1"/>
+          <p:nvPr/>
+        </p:nvSpPr>
+        <p:spPr>
+          <a:xfrm>
+            <a:off x="10972800" y="640080"/>
+            <a:ext cx="1097280" cy="1097280"/>
+          </a:xfrm>
+          <a:prstGeom prst="rect">
+            <a:avLst/>
+          </a:prstGeom>
+          <a:noFill/>
+        </p:spPr>
+        <p:txBody>
+          <a:bodyPr wrap="none">
+            <a:spAutoFit/>
+          </a:bodyPr>
+          <a:lstStyle/>
+          <a:p>
+            <a:pPr algn="l">
+              <a:spcAft>
+                <a:spcPts val="0"/>
+              </a:spcAft>
+              <a:defRPr sz="1800">
+                <a:solidFill>
+                  <a:srgbClr val="FFFFFF"/>
+                </a:solidFill>
+                <a:latin typeface="Montserrat"/>
+              </a:defRPr>
+            </a:pPr>
+            <a:r>
+              <a:t>+ + +</a:t>
+            </a:r>
+            <a:br/>
+            <a:r>
+              <a:t>+ + +</a:t>
+            </a:r>
+            <a:br/>
+            <a:r>
+              <a:t>+ + +</a:t>
+            </a:r>
+          </a:p>
+        </p:txBody>
+      </p:sp>
+      <p:sp>
+        <p:nvSpPr>
+          <p:cNvPr id="4" name="TextBox 3"/>
+          <p:cNvSpPr txBox="1"/>
+          <p:nvPr/>
+        </p:nvSpPr>
+        <p:spPr>
+          <a:xfrm>
+            <a:off x="457200" y="731520"/>
+            <a:ext cx="7315200" cy="548640"/>
+          </a:xfrm>
+          <a:prstGeom prst="rect">
+            <a:avLst/>
+          </a:prstGeom>
+          <a:noFill/>
+        </p:spPr>
+        <p:txBody>
+          <a:bodyPr wrap="none">
+            <a:spAutoFit/>
+          </a:bodyPr>
+          <a:lstStyle/>
+          <a:p>
+            <a:pPr algn="l">
+              <a:spcAft>
+                <a:spcPts val="0"/>
+              </a:spcAft>
+              <a:defRPr sz="3600" b="1">
+                <a:solidFill>
+                  <a:srgbClr val="FFFFFF"/>
+                </a:solidFill>
+                <a:latin typeface="Montserrat"/>
+              </a:defRPr>
+            </a:pPr>
+            <a:r>
+              <a:t>Executive Snapshot</a:t>
+            </a:r>
+          </a:p>
+        </p:txBody>
+      </p:sp>
+      <p:sp>
+        <p:nvSpPr>
+          <p:cNvPr id="5" name="Rounded Rectangle 4"/>
+          <p:cNvSpPr/>
+          <p:nvPr/>
+        </p:nvSpPr>
+        <p:spPr>
+          <a:xfrm>
+            <a:off x="365760" y="1554480"/>
+            <a:ext cx="2468880" cy="1554480"/>
+          </a:xfrm>
+          <a:prstGeom prst="roundRect">
+            <a:avLst/>
+          </a:prstGeom>
+          <a:solidFill>
+            <a:srgbClr val="15263F"/>
+          </a:solidFill>
+          <a:ln>
+            <a:noFill/>
+          </a:ln>
+          <a:effectLst/>
+        </p:spPr>
+        <p:style>
+          <a:lnRef idx="1">
+            <a:schemeClr val="accent1"/>
+          </a:lnRef>
+          <a:fillRef idx="3">
+            <a:schemeClr val="accent1"/>
+          </a:fillRef>
+          <a:effectRef idx="2">
+            <a:schemeClr val="accent1"/>
+          </a:effectRef>
+          <a:fontRef idx="minor">
+            <a:schemeClr val="lt1"/>
+          </a:fontRef>
+        </p:style>
+        <p:txBody>
+          <a:bodyPr rtlCol="0" anchor="ctr"/>
+          <a:lstStyle/>
+          <a:p>
+            <a:pPr algn="ctr"/>
+          </a:p>
+        </p:txBody>
+      </p:sp>
+      <p:sp>
+        <p:nvSpPr>
+          <p:cNvPr id="6" name="TextBox 5"/>
+          <p:cNvSpPr txBox="1"/>
+          <p:nvPr/>
+        </p:nvSpPr>
+        <p:spPr>
+          <a:xfrm>
+            <a:off x="1371600" y="1783080"/>
+            <a:ext cx="457200" cy="457200"/>
+          </a:xfrm>
+          <a:prstGeom prst="rect">
+            <a:avLst/>
+          </a:prstGeom>
+          <a:noFill/>
+        </p:spPr>
+        <p:txBody>
+          <a:bodyPr wrap="none">
+            <a:spAutoFit/>
+          </a:bodyPr>
+          <a:lstStyle/>
+          <a:p>
+            <a:pPr algn="ctr">
+              <a:spcAft>
+                <a:spcPts val="0"/>
+              </a:spcAft>
+              <a:defRPr sz="2000">
+                <a:solidFill>
+                  <a:srgbClr val="3498DB"/>
+                </a:solidFill>
+                <a:latin typeface="Segoe UI Emoji"/>
+              </a:defRPr>
+            </a:pPr>
+            <a:r>
+              <a:t>💼</a:t>
+            </a:r>
+          </a:p>
+        </p:txBody>
+      </p:sp>
+      <p:sp>
+        <p:nvSpPr>
+          <p:cNvPr id="7" name="TextBox 6"/>
+          <p:cNvSpPr txBox="1"/>
+          <p:nvPr/>
+        </p:nvSpPr>
+        <p:spPr>
+          <a:xfrm>
+            <a:off x="548640" y="2331720"/>
+            <a:ext cx="2103120" cy="274320"/>
+          </a:xfrm>
+          <a:prstGeom prst="rect">
+            <a:avLst/>
+          </a:prstGeom>
+          <a:noFill/>
+        </p:spPr>
+        <p:txBody>
+          <a:bodyPr wrap="none">
+            <a:spAutoFit/>
+          </a:bodyPr>
+          <a:lstStyle/>
+          <a:p>
+            <a:pPr algn="ctr">
+              <a:spcAft>
+                <a:spcPts val="0"/>
+              </a:spcAft>
+              <a:defRPr sz="1100" b="1">
+                <a:solidFill>
+                  <a:srgbClr val="8FA0B5"/>
+                </a:solidFill>
+                <a:latin typeface="Open Sans"/>
+              </a:defRPr>
+            </a:pPr>
+            <a:r>
+              <a:t>MONTHLY SPEND</a:t>
+            </a:r>
+          </a:p>
+        </p:txBody>
+      </p:sp>
+      <p:sp>
+        <p:nvSpPr>
+          <p:cNvPr id="8" name="TextBox 7"/>
+          <p:cNvSpPr txBox="1"/>
+          <p:nvPr/>
+        </p:nvSpPr>
+        <p:spPr>
+          <a:xfrm>
+            <a:off x="548640" y="2606040"/>
+            <a:ext cx="2103120" cy="640080"/>
+          </a:xfrm>
+          <a:prstGeom prst="rect">
+            <a:avLst/>
+          </a:prstGeom>
+          <a:noFill/>
+        </p:spPr>
+        <p:txBody>
+          <a:bodyPr wrap="none">
+            <a:spAutoFit/>
+          </a:bodyPr>
+          <a:lstStyle/>
+          <a:p>
+            <a:pPr algn="ctr">
+              <a:spcAft>
+                <a:spcPts val="0"/>
+              </a:spcAft>
+              <a:defRPr sz="2000" b="1">
+                <a:solidFill>
+                  <a:srgbClr val="FFFFFF"/>
+                </a:solidFill>
+                <a:latin typeface="Montserrat"/>
+              </a:defRPr>
+            </a:pPr>
+            <a:r>
+              <a:t>$29,200</a:t>
+            </a:r>
+          </a:p>
+        </p:txBody>
+      </p:sp>
+      <p:sp>
+        <p:nvSpPr>
+          <p:cNvPr id="9" name="Rounded Rectangle 8"/>
+          <p:cNvSpPr/>
+          <p:nvPr/>
+        </p:nvSpPr>
+        <p:spPr>
+          <a:xfrm>
+            <a:off x="2971800" y="1554480"/>
+            <a:ext cx="2468880" cy="1554480"/>
+          </a:xfrm>
+          <a:prstGeom prst="roundRect">
+            <a:avLst/>
+          </a:prstGeom>
+          <a:solidFill>
+            <a:srgbClr val="15263F"/>
+          </a:solidFill>
+          <a:ln>
+            <a:noFill/>
+          </a:ln>
+          <a:effectLst/>
+        </p:spPr>
+        <p:style>
+          <a:lnRef idx="1">
+            <a:schemeClr val="accent1"/>
+          </a:lnRef>
+          <a:fillRef idx="3">
+            <a:schemeClr val="accent1"/>
+          </a:fillRef>
+          <a:effectRef idx="2">
+            <a:schemeClr val="accent1"/>
+          </a:effectRef>
+          <a:fontRef idx="minor">
+            <a:schemeClr val="lt1"/>
+          </a:fontRef>
+        </p:style>
+        <p:txBody>
+          <a:bodyPr rtlCol="0" anchor="ctr"/>
+          <a:lstStyle/>
+          <a:p>
+            <a:pPr algn="ctr"/>
+          </a:p>
+        </p:txBody>
+      </p:sp>
+      <p:sp>
+        <p:nvSpPr>
+          <p:cNvPr id="10" name="TextBox 9"/>
+          <p:cNvSpPr txBox="1"/>
+          <p:nvPr/>
+        </p:nvSpPr>
+        <p:spPr>
+          <a:xfrm>
+            <a:off x="3977640" y="1783080"/>
+            <a:ext cx="457200" cy="457200"/>
+          </a:xfrm>
+          <a:prstGeom prst="rect">
+            <a:avLst/>
+          </a:prstGeom>
+          <a:noFill/>
+        </p:spPr>
+        <p:txBody>
+          <a:bodyPr wrap="none">
+            <a:spAutoFit/>
+          </a:bodyPr>
+          <a:lstStyle/>
+          <a:p>
+            <a:pPr algn="ctr">
+              <a:spcAft>
+                <a:spcPts val="0"/>
+              </a:spcAft>
+              <a:defRPr sz="2000">
+                <a:solidFill>
+                  <a:srgbClr val="3498DB"/>
+                </a:solidFill>
+                <a:latin typeface="Segoe UI Emoji"/>
+              </a:defRPr>
+            </a:pPr>
+            <a:r>
+              <a:t>📅</a:t>
+            </a:r>
+          </a:p>
+        </p:txBody>
+      </p:sp>
+      <p:sp>
+        <p:nvSpPr>
+          <p:cNvPr id="11" name="TextBox 10"/>
+          <p:cNvSpPr txBox="1"/>
+          <p:nvPr/>
+        </p:nvSpPr>
+        <p:spPr>
+          <a:xfrm>
+            <a:off x="3154680" y="2331720"/>
+            <a:ext cx="2103120" cy="274320"/>
+          </a:xfrm>
+          <a:prstGeom prst="rect">
+            <a:avLst/>
+          </a:prstGeom>
+          <a:noFill/>
+        </p:spPr>
+        <p:txBody>
+          <a:bodyPr wrap="none">
+            <a:spAutoFit/>
+          </a:bodyPr>
+          <a:lstStyle/>
+          <a:p>
+            <a:pPr algn="ctr">
+              <a:spcAft>
+                <a:spcPts val="0"/>
+              </a:spcAft>
+              <a:defRPr sz="1100" b="1">
+                <a:solidFill>
+                  <a:srgbClr val="8FA0B5"/>
+                </a:solidFill>
+                <a:latin typeface="Open Sans"/>
+              </a:defRPr>
+            </a:pPr>
+            <a:r>
+              <a:t>ANNUAL RUN RATE</a:t>
+            </a:r>
+          </a:p>
+        </p:txBody>
+      </p:sp>
+      <p:sp>
+        <p:nvSpPr>
+          <p:cNvPr id="12" name="TextBox 11"/>
+          <p:cNvSpPr txBox="1"/>
+          <p:nvPr/>
+        </p:nvSpPr>
+        <p:spPr>
+          <a:xfrm>
+            <a:off x="3154680" y="2606040"/>
+            <a:ext cx="2103120" cy="640080"/>
+          </a:xfrm>
+          <a:prstGeom prst="rect">
+            <a:avLst/>
+          </a:prstGeom>
+          <a:noFill/>
+        </p:spPr>
+        <p:txBody>
+          <a:bodyPr wrap="none">
+            <a:spAutoFit/>
+          </a:bodyPr>
+          <a:lstStyle/>
+          <a:p>
+            <a:pPr algn="ctr">
+              <a:spcAft>
+                <a:spcPts val="0"/>
+              </a:spcAft>
+              <a:defRPr sz="2000" b="1">
+                <a:solidFill>
+                  <a:srgbClr val="FFFFFF"/>
+                </a:solidFill>
+                <a:latin typeface="Montserrat"/>
+              </a:defRPr>
+            </a:pPr>
+            <a:r>
+              <a:t>$350,397</a:t>
+            </a:r>
+          </a:p>
+        </p:txBody>
+      </p:sp>
+      <p:sp>
+        <p:nvSpPr>
+          <p:cNvPr id="13" name="Rounded Rectangle 12"/>
+          <p:cNvSpPr/>
+          <p:nvPr/>
+        </p:nvSpPr>
+        <p:spPr>
+          <a:xfrm>
+            <a:off x="5577840" y="1554480"/>
+            <a:ext cx="2468880" cy="1554480"/>
+          </a:xfrm>
+          <a:prstGeom prst="roundRect">
+            <a:avLst/>
+          </a:prstGeom>
+          <a:solidFill>
+            <a:srgbClr val="15263F"/>
+          </a:solidFill>
+          <a:ln>
+            <a:noFill/>
+          </a:ln>
+          <a:effectLst/>
+        </p:spPr>
+        <p:style>
+          <a:lnRef idx="1">
+            <a:schemeClr val="accent1"/>
+          </a:lnRef>
+          <a:fillRef idx="3">
+            <a:schemeClr val="accent1"/>
+          </a:fillRef>
+          <a:effectRef idx="2">
+            <a:schemeClr val="accent1"/>
+          </a:effectRef>
+          <a:fontRef idx="minor">
+            <a:schemeClr val="lt1"/>
+          </a:fontRef>
+        </p:style>
+        <p:txBody>
+          <a:bodyPr rtlCol="0" anchor="ctr"/>
+          <a:lstStyle/>
+          <a:p>
+            <a:pPr algn="ctr"/>
+          </a:p>
+        </p:txBody>
+      </p:sp>
+      <p:sp>
+        <p:nvSpPr>
+          <p:cNvPr id="14" name="TextBox 13"/>
+          <p:cNvSpPr txBox="1"/>
+          <p:nvPr/>
+        </p:nvSpPr>
+        <p:spPr>
+          <a:xfrm>
+            <a:off x="6583680" y="1783080"/>
+            <a:ext cx="457200" cy="457200"/>
+          </a:xfrm>
+          <a:prstGeom prst="rect">
+            <a:avLst/>
+          </a:prstGeom>
+          <a:noFill/>
+        </p:spPr>
+        <p:txBody>
+          <a:bodyPr wrap="none">
+            <a:spAutoFit/>
+          </a:bodyPr>
+          <a:lstStyle/>
+          <a:p>
+            <a:pPr algn="ctr">
+              <a:spcAft>
+                <a:spcPts val="0"/>
+              </a:spcAft>
+              <a:defRPr sz="2000">
+                <a:solidFill>
+                  <a:srgbClr val="1ABC9C"/>
+                </a:solidFill>
+                <a:latin typeface="Segoe UI Emoji"/>
+              </a:defRPr>
+            </a:pPr>
+            <a:r>
+              <a:t>🐷</a:t>
+            </a:r>
+          </a:p>
+        </p:txBody>
+      </p:sp>
+      <p:sp>
+        <p:nvSpPr>
+          <p:cNvPr id="15" name="TextBox 14"/>
+          <p:cNvSpPr txBox="1"/>
+          <p:nvPr/>
+        </p:nvSpPr>
+        <p:spPr>
+          <a:xfrm>
+            <a:off x="5760720" y="2331720"/>
+            <a:ext cx="2103120" cy="274320"/>
+          </a:xfrm>
+          <a:prstGeom prst="rect">
+            <a:avLst/>
+          </a:prstGeom>
+          <a:noFill/>
+        </p:spPr>
+        <p:txBody>
+          <a:bodyPr wrap="none">
+            <a:spAutoFit/>
+          </a:bodyPr>
+          <a:lstStyle/>
+          <a:p>
+            <a:pPr algn="ctr">
+              <a:spcAft>
+                <a:spcPts val="0"/>
+              </a:spcAft>
+              <a:defRPr sz="1100" b="1">
+                <a:solidFill>
+                  <a:srgbClr val="1ABC9C"/>
+                </a:solidFill>
+                <a:latin typeface="Open Sans"/>
+              </a:defRPr>
+            </a:pPr>
+            <a:r>
+              <a:t>SAVINGS OPPORTUNITY</a:t>
+            </a:r>
+          </a:p>
+        </p:txBody>
+      </p:sp>
+      <p:sp>
+        <p:nvSpPr>
+          <p:cNvPr id="16" name="TextBox 15"/>
+          <p:cNvSpPr txBox="1"/>
+          <p:nvPr/>
+        </p:nvSpPr>
+        <p:spPr>
+          <a:xfrm>
+            <a:off x="5760720" y="2606040"/>
+            <a:ext cx="2103120" cy="640080"/>
+          </a:xfrm>
+          <a:prstGeom prst="rect">
+            <a:avLst/>
+          </a:prstGeom>
+          <a:noFill/>
+        </p:spPr>
+        <p:txBody>
+          <a:bodyPr wrap="none">
+            <a:spAutoFit/>
+          </a:bodyPr>
+          <a:lstStyle/>
+          <a:p>
+            <a:pPr algn="ctr">
+              <a:spcAft>
+                <a:spcPts val="0"/>
+              </a:spcAft>
+              <a:defRPr sz="2000" b="1">
+                <a:solidFill>
+                  <a:srgbClr val="FFFFFF"/>
+                </a:solidFill>
+                <a:latin typeface="Montserrat"/>
+              </a:defRPr>
+            </a:pPr>
+            <a:r>
+              <a:t>$15,650</a:t>
+            </a:r>
+          </a:p>
+        </p:txBody>
+      </p:sp>
+      <p:sp>
+        <p:nvSpPr>
+          <p:cNvPr id="17" name="Rounded Rectangle 16"/>
+          <p:cNvSpPr/>
+          <p:nvPr/>
+        </p:nvSpPr>
+        <p:spPr>
+          <a:xfrm>
+            <a:off x="1188720" y="3383280"/>
+            <a:ext cx="2468880" cy="1554480"/>
+          </a:xfrm>
+          <a:prstGeom prst="roundRect">
+            <a:avLst/>
+          </a:prstGeom>
+          <a:solidFill>
+            <a:srgbClr val="15263F"/>
+          </a:solidFill>
+          <a:ln>
+            <a:noFill/>
+          </a:ln>
+          <a:effectLst/>
+        </p:spPr>
+        <p:style>
+          <a:lnRef idx="1">
+            <a:schemeClr val="accent1"/>
+          </a:lnRef>
+          <a:fillRef idx="3">
+            <a:schemeClr val="accent1"/>
+          </a:fillRef>
+          <a:effectRef idx="2">
+            <a:schemeClr val="accent1"/>
+          </a:effectRef>
+          <a:fontRef idx="minor">
+            <a:schemeClr val="lt1"/>
+          </a:fontRef>
+        </p:style>
+        <p:txBody>
+          <a:bodyPr rtlCol="0" anchor="ctr"/>
+          <a:lstStyle/>
+          <a:p>
+            <a:pPr algn="ctr"/>
+          </a:p>
+        </p:txBody>
+      </p:sp>
+      <p:sp>
+        <p:nvSpPr>
+          <p:cNvPr id="18" name="TextBox 17"/>
+          <p:cNvSpPr txBox="1"/>
+          <p:nvPr/>
+        </p:nvSpPr>
+        <p:spPr>
+          <a:xfrm>
+            <a:off x="2194560" y="3611880"/>
+            <a:ext cx="457200" cy="457200"/>
+          </a:xfrm>
+          <a:prstGeom prst="rect">
+            <a:avLst/>
+          </a:prstGeom>
+          <a:noFill/>
+        </p:spPr>
+        <p:txBody>
+          <a:bodyPr wrap="none">
+            <a:spAutoFit/>
+          </a:bodyPr>
+          <a:lstStyle/>
+          <a:p>
+            <a:pPr algn="ctr">
+              <a:spcAft>
+                <a:spcPts val="0"/>
+              </a:spcAft>
+              <a:defRPr sz="2000">
+                <a:solidFill>
+                  <a:srgbClr val="3498DB"/>
+                </a:solidFill>
+                <a:latin typeface="Segoe UI Emoji"/>
+              </a:defRPr>
+            </a:pPr>
+            <a:r>
+              <a:t>🖥️</a:t>
+            </a:r>
+          </a:p>
+        </p:txBody>
+      </p:sp>
+      <p:sp>
+        <p:nvSpPr>
+          <p:cNvPr id="19" name="TextBox 18"/>
+          <p:cNvSpPr txBox="1"/>
+          <p:nvPr/>
+        </p:nvSpPr>
+        <p:spPr>
+          <a:xfrm>
+            <a:off x="1371600" y="4160520"/>
+            <a:ext cx="2103120" cy="274320"/>
+          </a:xfrm>
+          <a:prstGeom prst="rect">
+            <a:avLst/>
+          </a:prstGeom>
+          <a:noFill/>
+        </p:spPr>
+        <p:txBody>
+          <a:bodyPr wrap="none">
+            <a:spAutoFit/>
+          </a:bodyPr>
+          <a:lstStyle/>
+          <a:p>
+            <a:pPr algn="ctr">
+              <a:spcAft>
+                <a:spcPts val="0"/>
+              </a:spcAft>
+              <a:defRPr sz="1100" b="1">
+                <a:solidFill>
+                  <a:srgbClr val="8FA0B5"/>
+                </a:solidFill>
+                <a:latin typeface="Open Sans"/>
+              </a:defRPr>
+            </a:pPr>
+            <a:r>
+              <a:t>TOP COST DRIVER</a:t>
+            </a:r>
+          </a:p>
+        </p:txBody>
+      </p:sp>
+      <p:sp>
+        <p:nvSpPr>
+          <p:cNvPr id="20" name="TextBox 19"/>
+          <p:cNvSpPr txBox="1"/>
+          <p:nvPr/>
+        </p:nvSpPr>
+        <p:spPr>
+          <a:xfrm>
+            <a:off x="1371600" y="4434840"/>
+            <a:ext cx="2103120" cy="640080"/>
+          </a:xfrm>
+          <a:prstGeom prst="rect">
+            <a:avLst/>
+          </a:prstGeom>
+          <a:noFill/>
+        </p:spPr>
+        <p:txBody>
+          <a:bodyPr wrap="none">
+            <a:spAutoFit/>
+          </a:bodyPr>
+          <a:lstStyle/>
+          <a:p>
+            <a:pPr algn="ctr">
+              <a:spcAft>
+                <a:spcPts val="0"/>
+              </a:spcAft>
+              <a:defRPr sz="2000" b="1">
+                <a:solidFill>
+                  <a:srgbClr val="FFFFFF"/>
+                </a:solidFill>
+                <a:latin typeface="Montserrat"/>
+              </a:defRPr>
+            </a:pPr>
+            <a:r>
+              <a:t>EC2</a:t>
+            </a:r>
+          </a:p>
+        </p:txBody>
+      </p:sp>
+      <p:sp>
+        <p:nvSpPr>
+          <p:cNvPr id="21" name="Rounded Rectangle 20"/>
+          <p:cNvSpPr/>
+          <p:nvPr/>
+        </p:nvSpPr>
+        <p:spPr>
+          <a:xfrm>
+            <a:off x="4572000" y="3383280"/>
+            <a:ext cx="2468880" cy="1554480"/>
+          </a:xfrm>
+          <a:prstGeom prst="roundRect">
+            <a:avLst/>
+          </a:prstGeom>
+          <a:solidFill>
+            <a:srgbClr val="15263F"/>
+          </a:solidFill>
+          <a:ln>
+            <a:noFill/>
+          </a:ln>
+          <a:effectLst/>
+        </p:spPr>
+        <p:style>
+          <a:lnRef idx="1">
+            <a:schemeClr val="accent1"/>
+          </a:lnRef>
+          <a:fillRef idx="3">
+            <a:schemeClr val="accent1"/>
+          </a:fillRef>
+          <a:effectRef idx="2">
+            <a:schemeClr val="accent1"/>
+          </a:effectRef>
+          <a:fontRef idx="minor">
+            <a:schemeClr val="lt1"/>
+          </a:fontRef>
+        </p:style>
+        <p:txBody>
+          <a:bodyPr rtlCol="0" anchor="ctr"/>
+          <a:lstStyle/>
+          <a:p>
+            <a:pPr algn="ctr"/>
+          </a:p>
+        </p:txBody>
+      </p:sp>
+      <p:sp>
+        <p:nvSpPr>
+          <p:cNvPr id="22" name="TextBox 21"/>
+          <p:cNvSpPr txBox="1"/>
+          <p:nvPr/>
+        </p:nvSpPr>
+        <p:spPr>
+          <a:xfrm>
+            <a:off x="5577840" y="3611880"/>
+            <a:ext cx="457200" cy="457200"/>
+          </a:xfrm>
+          <a:prstGeom prst="rect">
+            <a:avLst/>
+          </a:prstGeom>
+          <a:noFill/>
+        </p:spPr>
+        <p:txBody>
+          <a:bodyPr wrap="none">
+            <a:spAutoFit/>
+          </a:bodyPr>
+          <a:lstStyle/>
+          <a:p>
+            <a:pPr algn="ctr">
+              <a:spcAft>
+                <a:spcPts val="0"/>
+              </a:spcAft>
+              <a:defRPr sz="2000">
+                <a:solidFill>
+                  <a:srgbClr val="1ABC9C"/>
+                </a:solidFill>
+                <a:latin typeface="Segoe UI Emoji"/>
+              </a:defRPr>
+            </a:pPr>
+            <a:r>
+              <a:t>⏱️</a:t>
+            </a:r>
+          </a:p>
+        </p:txBody>
+      </p:sp>
+      <p:sp>
+        <p:nvSpPr>
+          <p:cNvPr id="23" name="TextBox 22"/>
+          <p:cNvSpPr txBox="1"/>
+          <p:nvPr/>
+        </p:nvSpPr>
+        <p:spPr>
+          <a:xfrm>
+            <a:off x="4754880" y="4160520"/>
+            <a:ext cx="2103120" cy="274320"/>
+          </a:xfrm>
+          <a:prstGeom prst="rect">
+            <a:avLst/>
+          </a:prstGeom>
+          <a:noFill/>
+        </p:spPr>
+        <p:txBody>
+          <a:bodyPr wrap="none">
+            <a:spAutoFit/>
+          </a:bodyPr>
+          <a:lstStyle/>
+          <a:p>
+            <a:pPr algn="ctr">
+              <a:spcAft>
+                <a:spcPts val="0"/>
+              </a:spcAft>
+              <a:defRPr sz="1100" b="1">
+                <a:solidFill>
+                  <a:srgbClr val="1ABC9C"/>
+                </a:solidFill>
+                <a:latin typeface="Open Sans"/>
+              </a:defRPr>
+            </a:pPr>
+            <a:r>
+              <a:t>CLOUD MATURITY</a:t>
+            </a:r>
+          </a:p>
+        </p:txBody>
+      </p:sp>
+      <p:sp>
+        <p:nvSpPr>
+          <p:cNvPr id="24" name="TextBox 23"/>
+          <p:cNvSpPr txBox="1"/>
+          <p:nvPr/>
+        </p:nvSpPr>
+        <p:spPr>
+          <a:xfrm>
+            <a:off x="4754880" y="4434840"/>
+            <a:ext cx="2103120" cy="640080"/>
+          </a:xfrm>
+          <a:prstGeom prst="rect">
+            <a:avLst/>
+          </a:prstGeom>
+          <a:noFill/>
+        </p:spPr>
+        <p:txBody>
+          <a:bodyPr wrap="none">
+            <a:spAutoFit/>
+          </a:bodyPr>
+          <a:lstStyle/>
+          <a:p>
+            <a:pPr algn="ctr">
+              <a:spcAft>
+                <a:spcPts val="0"/>
+              </a:spcAft>
+              <a:defRPr sz="2000" b="1">
+                <a:solidFill>
+                  <a:srgbClr val="FFFFFF"/>
+                </a:solidFill>
+                <a:latin typeface="Montserrat"/>
+              </a:defRPr>
+            </a:pPr>
+            <a:r>
+              <a:t>81/100</a:t>
             </a:r>
           </a:p>
         </p:txBody>
@@ -3343,12 +4582,12 @@
           </a:p>
           <a:p>
             <a:r>
-              <a:t>• Monthly Spend: ₹29,202</a:t>
-            </a:r>
-          </a:p>
-          <a:p>
-            <a:r>
-              <a:t>• Annual Run Rate: ₹350,430</a:t>
+              <a:t>• Monthly Spend: ₹29,200</a:t>
+            </a:r>
+          </a:p>
+          <a:p>
+            <a:r>
+              <a:t>• Annual Run Rate: ₹350,397</a:t>
             </a:r>
           </a:p>
           <a:p>
